--- a/MyOwnPresentations/Sorting_Algorithms_VIII.pptx
+++ b/MyOwnPresentations/Sorting_Algorithms_VIII.pptx
@@ -20,52 +20,51 @@
     <p:sldId id="270" r:id="rId14"/>
     <p:sldId id="271" r:id="rId15"/>
     <p:sldId id="274" r:id="rId16"/>
-    <p:sldId id="275" r:id="rId17"/>
-    <p:sldId id="276" r:id="rId18"/>
-    <p:sldId id="280" r:id="rId19"/>
-    <p:sldId id="282" r:id="rId20"/>
-    <p:sldId id="277" r:id="rId21"/>
-    <p:sldId id="278" r:id="rId22"/>
-    <p:sldId id="284" r:id="rId23"/>
-    <p:sldId id="283" r:id="rId24"/>
-    <p:sldId id="285" r:id="rId25"/>
-    <p:sldId id="279" r:id="rId26"/>
-    <p:sldId id="287" r:id="rId27"/>
-    <p:sldId id="288" r:id="rId28"/>
-    <p:sldId id="303" r:id="rId29"/>
-    <p:sldId id="350" r:id="rId30"/>
-    <p:sldId id="317" r:id="rId31"/>
-    <p:sldId id="318" r:id="rId32"/>
-    <p:sldId id="319" r:id="rId33"/>
-    <p:sldId id="320" r:id="rId34"/>
-    <p:sldId id="321" r:id="rId35"/>
-    <p:sldId id="322" r:id="rId36"/>
-    <p:sldId id="323" r:id="rId37"/>
-    <p:sldId id="324" r:id="rId38"/>
-    <p:sldId id="325" r:id="rId39"/>
-    <p:sldId id="326" r:id="rId40"/>
-    <p:sldId id="327" r:id="rId41"/>
-    <p:sldId id="328" r:id="rId42"/>
-    <p:sldId id="329" r:id="rId43"/>
-    <p:sldId id="330" r:id="rId44"/>
-    <p:sldId id="331" r:id="rId45"/>
-    <p:sldId id="332" r:id="rId46"/>
-    <p:sldId id="334" r:id="rId47"/>
-    <p:sldId id="336" r:id="rId48"/>
-    <p:sldId id="337" r:id="rId49"/>
-    <p:sldId id="338" r:id="rId50"/>
-    <p:sldId id="339" r:id="rId51"/>
-    <p:sldId id="340" r:id="rId52"/>
+    <p:sldId id="351" r:id="rId17"/>
+    <p:sldId id="275" r:id="rId18"/>
+    <p:sldId id="276" r:id="rId19"/>
+    <p:sldId id="280" r:id="rId20"/>
+    <p:sldId id="282" r:id="rId21"/>
+    <p:sldId id="277" r:id="rId22"/>
+    <p:sldId id="278" r:id="rId23"/>
+    <p:sldId id="284" r:id="rId24"/>
+    <p:sldId id="283" r:id="rId25"/>
+    <p:sldId id="285" r:id="rId26"/>
+    <p:sldId id="279" r:id="rId27"/>
+    <p:sldId id="287" r:id="rId28"/>
+    <p:sldId id="288" r:id="rId29"/>
+    <p:sldId id="303" r:id="rId30"/>
+    <p:sldId id="350" r:id="rId31"/>
+    <p:sldId id="317" r:id="rId32"/>
+    <p:sldId id="318" r:id="rId33"/>
+    <p:sldId id="319" r:id="rId34"/>
+    <p:sldId id="320" r:id="rId35"/>
+    <p:sldId id="321" r:id="rId36"/>
+    <p:sldId id="322" r:id="rId37"/>
+    <p:sldId id="323" r:id="rId38"/>
+    <p:sldId id="324" r:id="rId39"/>
+    <p:sldId id="325" r:id="rId40"/>
+    <p:sldId id="326" r:id="rId41"/>
+    <p:sldId id="327" r:id="rId42"/>
+    <p:sldId id="328" r:id="rId43"/>
+    <p:sldId id="329" r:id="rId44"/>
+    <p:sldId id="330" r:id="rId45"/>
+    <p:sldId id="331" r:id="rId46"/>
+    <p:sldId id="332" r:id="rId47"/>
+    <p:sldId id="334" r:id="rId48"/>
+    <p:sldId id="336" r:id="rId49"/>
+    <p:sldId id="337" r:id="rId50"/>
+    <p:sldId id="338" r:id="rId51"/>
+    <p:sldId id="339" r:id="rId52"/>
     <p:sldId id="341" r:id="rId53"/>
     <p:sldId id="333" r:id="rId54"/>
-    <p:sldId id="342" r:id="rId55"/>
-    <p:sldId id="335" r:id="rId56"/>
-    <p:sldId id="344" r:id="rId57"/>
-    <p:sldId id="343" r:id="rId58"/>
-    <p:sldId id="345" r:id="rId59"/>
-    <p:sldId id="346" r:id="rId60"/>
-    <p:sldId id="348" r:id="rId61"/>
-    <p:sldId id="347" r:id="rId62"/>
+    <p:sldId id="335" r:id="rId55"/>
+    <p:sldId id="344" r:id="rId56"/>
+    <p:sldId id="343" r:id="rId57"/>
+    <p:sldId id="345" r:id="rId58"/>
+    <p:sldId id="346" r:id="rId59"/>
+    <p:sldId id="348" r:id="rId60"/>
+    <p:sldId id="347" r:id="rId61"/>
   </p:sldIdLst>
   <p:sldSz cx="12192000" cy="6858000"/>
   <p:notesSz cx="6858000" cy="9144000"/>
@@ -22552,6 +22551,406 @@
       </p:grpSpPr>
       <p:sp useBgFill="1">
         <p:nvSpPr>
+          <p:cNvPr id="9" name="Slide Background">
+            <a:extLst>
+              <a:ext uri="{FF2B5EF4-FFF2-40B4-BE49-F238E27FC236}">
+                <a16:creationId xmlns:a16="http://schemas.microsoft.com/office/drawing/2014/main" id="{3ECBE1F1-D69B-4AFA-ABD5-8E41720EF6DE}"/>
+              </a:ext>
+              <a:ext uri="{C183D7F6-B498-43B3-948B-1728B52AA6E4}">
+                <adec:decorative xmlns:adec="http://schemas.microsoft.com/office/drawing/2017/decorative" val="1"/>
+              </a:ext>
+            </a:extLst>
+          </p:cNvPr>
+          <p:cNvSpPr>
+            <a:spLocks noGrp="1" noRot="1" noChangeAspect="1" noMove="1" noResize="1" noEditPoints="1" noAdjustHandles="1" noChangeArrowheads="1" noChangeShapeType="1" noTextEdit="1"/>
+          </p:cNvSpPr>
+          <p:nvPr>
+            <p:extLst>
+              <p:ext uri="{386F3935-93C4-4BCD-93E2-E3B085C9AB24}">
+                <p16:designElem xmlns:p16="http://schemas.microsoft.com/office/powerpoint/2015/main" val="1"/>
+              </p:ext>
+            </p:extLst>
+          </p:nvPr>
+        </p:nvSpPr>
+        <p:spPr>
+          <a:xfrm>
+            <a:off x="0" y="0"/>
+            <a:ext cx="12192000" cy="6858000"/>
+          </a:xfrm>
+          <a:prstGeom prst="rect">
+            <a:avLst/>
+          </a:prstGeom>
+          <a:ln>
+            <a:noFill/>
+          </a:ln>
+        </p:spPr>
+        <p:style>
+          <a:lnRef idx="2">
+            <a:schemeClr val="accent1">
+              <a:shade val="50000"/>
+            </a:schemeClr>
+          </a:lnRef>
+          <a:fillRef idx="1">
+            <a:schemeClr val="accent1"/>
+          </a:fillRef>
+          <a:effectRef idx="0">
+            <a:schemeClr val="accent1"/>
+          </a:effectRef>
+          <a:fontRef idx="minor">
+            <a:schemeClr val="lt1"/>
+          </a:fontRef>
+        </p:style>
+        <p:txBody>
+          <a:bodyPr rtlCol="0" anchor="ctr"/>
+          <a:lstStyle/>
+          <a:p>
+            <a:pPr algn="ctr"/>
+            <a:endParaRPr lang="en-US"/>
+          </a:p>
+        </p:txBody>
+      </p:sp>
+      <p:pic>
+        <p:nvPicPr>
+          <p:cNvPr id="5" name="Picture 4" descr="A close-up of a police car&#10;&#10;AI-generated content may be incorrect.">
+            <a:extLst>
+              <a:ext uri="{FF2B5EF4-FFF2-40B4-BE49-F238E27FC236}">
+                <a16:creationId xmlns:a16="http://schemas.microsoft.com/office/drawing/2014/main" id="{E54D845E-755B-189D-5298-78FE4A653906}"/>
+              </a:ext>
+            </a:extLst>
+          </p:cNvPr>
+          <p:cNvPicPr>
+            <a:picLocks noChangeAspect="1"/>
+          </p:cNvPicPr>
+          <p:nvPr/>
+        </p:nvPicPr>
+        <p:blipFill>
+          <a:blip r:embed="rId2"/>
+          <a:srcRect l="34159" r="21466"/>
+          <a:stretch>
+            <a:fillRect/>
+          </a:stretch>
+        </p:blipFill>
+        <p:spPr>
+          <a:xfrm>
+            <a:off x="-1" y="-2"/>
+            <a:ext cx="5410198" cy="6858002"/>
+          </a:xfrm>
+          <a:prstGeom prst="rect">
+            <a:avLst/>
+          </a:prstGeom>
+        </p:spPr>
+      </p:pic>
+      <p:sp useBgFill="1">
+        <p:nvSpPr>
+          <p:cNvPr id="11" name="Rectangle 10">
+            <a:extLst>
+              <a:ext uri="{FF2B5EF4-FFF2-40B4-BE49-F238E27FC236}">
+                <a16:creationId xmlns:a16="http://schemas.microsoft.com/office/drawing/2014/main" id="{603A6265-E10C-4B85-9C20-E75FCAF9CC63}"/>
+              </a:ext>
+              <a:ext uri="{C183D7F6-B498-43B3-948B-1728B52AA6E4}">
+                <adec:decorative xmlns:adec="http://schemas.microsoft.com/office/drawing/2017/decorative" val="1"/>
+              </a:ext>
+            </a:extLst>
+          </p:cNvPr>
+          <p:cNvSpPr>
+            <a:spLocks noGrp="1" noRot="1" noChangeAspect="1" noMove="1" noResize="1" noEditPoints="1" noAdjustHandles="1" noChangeArrowheads="1" noChangeShapeType="1" noTextEdit="1"/>
+          </p:cNvSpPr>
+          <p:nvPr>
+            <p:extLst>
+              <p:ext uri="{386F3935-93C4-4BCD-93E2-E3B085C9AB24}">
+                <p16:designElem xmlns:p16="http://schemas.microsoft.com/office/powerpoint/2015/main" val="1"/>
+              </p:ext>
+            </p:extLst>
+          </p:nvPr>
+        </p:nvSpPr>
+        <p:spPr>
+          <a:xfrm>
+            <a:off x="5410197" y="-1"/>
+            <a:ext cx="6781802" cy="2286000"/>
+          </a:xfrm>
+          <a:prstGeom prst="rect">
+            <a:avLst/>
+          </a:prstGeom>
+          <a:ln>
+            <a:noFill/>
+          </a:ln>
+          <a:effectLst>
+            <a:outerShdw blurRad="355600" dist="152400" sx="95000" sy="95000" algn="t" rotWithShape="0">
+              <a:srgbClr val="000000">
+                <a:alpha val="29000"/>
+              </a:srgbClr>
+            </a:outerShdw>
+          </a:effectLst>
+        </p:spPr>
+        <p:style>
+          <a:lnRef idx="2">
+            <a:schemeClr val="accent1">
+              <a:shade val="50000"/>
+            </a:schemeClr>
+          </a:lnRef>
+          <a:fillRef idx="1">
+            <a:schemeClr val="accent1"/>
+          </a:fillRef>
+          <a:effectRef idx="0">
+            <a:schemeClr val="accent1"/>
+          </a:effectRef>
+          <a:fontRef idx="minor">
+            <a:schemeClr val="lt1"/>
+          </a:fontRef>
+        </p:style>
+        <p:txBody>
+          <a:bodyPr rtlCol="0" anchor="ctr"/>
+          <a:lstStyle/>
+          <a:p>
+            <a:pPr algn="ctr"/>
+            <a:endParaRPr lang="en-US"/>
+          </a:p>
+        </p:txBody>
+      </p:sp>
+      <p:sp>
+        <p:nvSpPr>
+          <p:cNvPr id="2" name="Title 1">
+            <a:extLst>
+              <a:ext uri="{FF2B5EF4-FFF2-40B4-BE49-F238E27FC236}">
+                <a16:creationId xmlns:a16="http://schemas.microsoft.com/office/drawing/2014/main" id="{3D5375CC-6D21-0F25-AF19-48A21DE7163D}"/>
+              </a:ext>
+            </a:extLst>
+          </p:cNvPr>
+          <p:cNvSpPr>
+            <a:spLocks noGrp="1"/>
+          </p:cNvSpPr>
+          <p:nvPr>
+            <p:ph type="title"/>
+          </p:nvPr>
+        </p:nvSpPr>
+        <p:spPr>
+          <a:xfrm>
+            <a:off x="6115317" y="405685"/>
+            <a:ext cx="5464968" cy="1559301"/>
+          </a:xfrm>
+        </p:spPr>
+        <p:txBody>
+          <a:bodyPr>
+            <a:normAutofit/>
+          </a:bodyPr>
+          <a:lstStyle/>
+          <a:p>
+            <a:r>
+              <a:rPr lang="en-US" sz="4000" dirty="0"/>
+              <a:t>F.Y.I - Watching security footage for stolen items</a:t>
+            </a:r>
+          </a:p>
+        </p:txBody>
+      </p:sp>
+      <mc:AlternateContent xmlns:mc="http://schemas.openxmlformats.org/markup-compatibility/2006">
+        <mc:Choice xmlns:a14="http://schemas.microsoft.com/office/drawing/2010/main" Requires="a14">
+          <p:sp>
+            <p:nvSpPr>
+              <p:cNvPr id="3" name="Content Placeholder 2">
+                <a:extLst>
+                  <a:ext uri="{FF2B5EF4-FFF2-40B4-BE49-F238E27FC236}">
+                    <a16:creationId xmlns:a16="http://schemas.microsoft.com/office/drawing/2014/main" id="{9C29CFEC-7BF4-2984-030E-7B8196140612}"/>
+                  </a:ext>
+                </a:extLst>
+              </p:cNvPr>
+              <p:cNvSpPr>
+                <a:spLocks noGrp="1"/>
+              </p:cNvSpPr>
+              <p:nvPr>
+                <p:ph idx="1"/>
+              </p:nvPr>
+            </p:nvSpPr>
+            <p:spPr>
+              <a:xfrm>
+                <a:off x="6115317" y="2743200"/>
+                <a:ext cx="5247340" cy="3496878"/>
+              </a:xfrm>
+            </p:spPr>
+            <p:txBody>
+              <a:bodyPr anchor="ctr">
+                <a:normAutofit/>
+              </a:bodyPr>
+              <a:lstStyle/>
+              <a:p>
+                <a:r>
+                  <a:rPr lang="en-US" sz="2000" dirty="0"/>
+                  <a:t>Binary search!</a:t>
+                </a:r>
+              </a:p>
+              <a:p>
+                <a:pPr lvl="1"/>
+                <a:r>
+                  <a:rPr lang="en-US" sz="2000" dirty="0"/>
+                  <a:t>Start at the middle of the footage</a:t>
+                </a:r>
+              </a:p>
+              <a:p>
+                <a:pPr lvl="1"/>
+                <a:r>
+                  <a:rPr lang="en-US" sz="2000" dirty="0"/>
+                  <a:t>If the item is present, move to the ¾ marker </a:t>
+                </a:r>
+              </a:p>
+              <a:p>
+                <a:pPr lvl="1"/>
+                <a:r>
+                  <a:rPr lang="en-US" sz="2000" dirty="0"/>
+                  <a:t>If not, move to the ¼ marker</a:t>
+                </a:r>
+              </a:p>
+              <a:p>
+                <a:pPr lvl="1"/>
+                <a:r>
+                  <a:rPr lang="en-US" sz="2000" dirty="0"/>
+                  <a:t>You will find the exact time the item was stolen in </a:t>
+                </a:r>
+                <a14:m>
+                  <m:oMath xmlns:m="http://schemas.openxmlformats.org/officeDocument/2006/math">
+                    <m:func>
+                      <m:funcPr>
+                        <m:ctrlPr>
+                          <a:rPr lang="en-US" sz="2000" i="1">
+                            <a:latin typeface="Cambria Math" panose="02040503050406030204" pitchFamily="18" charset="0"/>
+                          </a:rPr>
+                        </m:ctrlPr>
+                      </m:funcPr>
+                      <m:fName>
+                        <m:sSub>
+                          <m:sSubPr>
+                            <m:ctrlPr>
+                              <a:rPr lang="en-US" sz="2000" i="1">
+                                <a:latin typeface="Cambria Math" panose="02040503050406030204" pitchFamily="18" charset="0"/>
+                              </a:rPr>
+                            </m:ctrlPr>
+                          </m:sSubPr>
+                          <m:e>
+                            <m:r>
+                              <m:rPr>
+                                <m:sty m:val="p"/>
+                              </m:rPr>
+                              <a:rPr lang="en-US" sz="2000" i="0">
+                                <a:latin typeface="Cambria Math" panose="02040503050406030204" pitchFamily="18" charset="0"/>
+                              </a:rPr>
+                              <m:t>log</m:t>
+                            </m:r>
+                          </m:e>
+                          <m:sub>
+                            <m:r>
+                              <a:rPr lang="en-US" sz="2000" b="0" i="1">
+                                <a:latin typeface="Cambria Math" panose="02040503050406030204" pitchFamily="18" charset="0"/>
+                              </a:rPr>
+                              <m:t>2</m:t>
+                            </m:r>
+                          </m:sub>
+                        </m:sSub>
+                      </m:fName>
+                      <m:e>
+                        <m:r>
+                          <a:rPr lang="en-US" sz="2000" b="0" i="1">
+                            <a:latin typeface="Cambria Math" panose="02040503050406030204" pitchFamily="18" charset="0"/>
+                          </a:rPr>
+                          <m:t>𝑛</m:t>
+                        </m:r>
+                      </m:e>
+                    </m:func>
+                  </m:oMath>
+                </a14:m>
+                <a:r>
+                  <a:rPr lang="en-US" sz="2000" i="1" dirty="0"/>
+                  <a:t> </a:t>
+                </a:r>
+                <a:r>
+                  <a:rPr lang="en-US" sz="2000" dirty="0"/>
+                  <a:t>time</a:t>
+                </a:r>
+              </a:p>
+            </p:txBody>
+          </p:sp>
+        </mc:Choice>
+        <mc:Fallback>
+          <p:sp>
+            <p:nvSpPr>
+              <p:cNvPr id="3" name="Content Placeholder 2">
+                <a:extLst>
+                  <a:ext uri="{FF2B5EF4-FFF2-40B4-BE49-F238E27FC236}">
+                    <a16:creationId xmlns:a16="http://schemas.microsoft.com/office/drawing/2014/main" id="{9C29CFEC-7BF4-2984-030E-7B8196140612}"/>
+                  </a:ext>
+                </a:extLst>
+              </p:cNvPr>
+              <p:cNvSpPr>
+                <a:spLocks noGrp="1" noRot="1" noChangeAspect="1" noMove="1" noResize="1" noEditPoints="1" noAdjustHandles="1" noChangeArrowheads="1" noChangeShapeType="1" noTextEdit="1"/>
+              </p:cNvSpPr>
+              <p:nvPr>
+                <p:ph idx="1"/>
+              </p:nvPr>
+            </p:nvSpPr>
+            <p:spPr>
+              <a:xfrm>
+                <a:off x="6115317" y="2743200"/>
+                <a:ext cx="5247340" cy="3496878"/>
+              </a:xfrm>
+              <a:blipFill>
+                <a:blip r:embed="rId3"/>
+                <a:stretch>
+                  <a:fillRect l="-1045" r="-1626"/>
+                </a:stretch>
+              </a:blipFill>
+            </p:spPr>
+            <p:txBody>
+              <a:bodyPr/>
+              <a:lstStyle/>
+              <a:p>
+                <a:r>
+                  <a:rPr lang="en-US">
+                    <a:noFill/>
+                  </a:rPr>
+                  <a:t> </a:t>
+                </a:r>
+              </a:p>
+            </p:txBody>
+          </p:sp>
+        </mc:Fallback>
+      </mc:AlternateContent>
+    </p:spTree>
+    <p:extLst>
+      <p:ext uri="{BB962C8B-B14F-4D97-AF65-F5344CB8AC3E}">
+        <p14:creationId xmlns:p14="http://schemas.microsoft.com/office/powerpoint/2010/main" val="1656787700"/>
+      </p:ext>
+    </p:extLst>
+  </p:cSld>
+  <p:clrMapOvr>
+    <a:masterClrMapping/>
+  </p:clrMapOvr>
+</p:sld>
+</file>
+
+<file path=ppt/slides/slide17.xml><?xml version="1.0" encoding="utf-8"?>
+<p:sld xmlns:a="http://schemas.openxmlformats.org/drawingml/2006/main" xmlns:r="http://schemas.openxmlformats.org/officeDocument/2006/relationships" xmlns:p="http://schemas.openxmlformats.org/presentationml/2006/main">
+  <p:cSld>
+    <p:bg>
+      <p:bgPr>
+        <a:solidFill>
+          <a:schemeClr val="bg1"/>
+        </a:solidFill>
+        <a:effectLst/>
+      </p:bgPr>
+    </p:bg>
+    <p:spTree>
+      <p:nvGrpSpPr>
+        <p:cNvPr id="1" name=""/>
+        <p:cNvGrpSpPr/>
+        <p:nvPr/>
+      </p:nvGrpSpPr>
+      <p:grpSpPr>
+        <a:xfrm>
+          <a:off x="0" y="0"/>
+          <a:ext cx="0" cy="0"/>
+          <a:chOff x="0" y="0"/>
+          <a:chExt cx="0" cy="0"/>
+        </a:xfrm>
+      </p:grpSpPr>
+      <p:sp useBgFill="1">
+        <p:nvSpPr>
           <p:cNvPr id="12" name="Rectangle 11">
             <a:extLst>
               <a:ext uri="{FF2B5EF4-FFF2-40B4-BE49-F238E27FC236}">
@@ -22753,7 +23152,7 @@
 </p:sld>
 </file>
 
-<file path=ppt/slides/slide17.xml><?xml version="1.0" encoding="utf-8"?>
+<file path=ppt/slides/slide18.xml><?xml version="1.0" encoding="utf-8"?>
 <p:sld xmlns:a="http://schemas.openxmlformats.org/drawingml/2006/main" xmlns:r="http://schemas.openxmlformats.org/officeDocument/2006/relationships" xmlns:p="http://schemas.openxmlformats.org/presentationml/2006/main">
   <p:cSld>
     <p:bg>
@@ -23453,7 +23852,7 @@
 </p:sld>
 </file>
 
-<file path=ppt/slides/slide18.xml><?xml version="1.0" encoding="utf-8"?>
+<file path=ppt/slides/slide19.xml><?xml version="1.0" encoding="utf-8"?>
 <p:sld xmlns:a="http://schemas.openxmlformats.org/drawingml/2006/main" xmlns:r="http://schemas.openxmlformats.org/officeDocument/2006/relationships" xmlns:p="http://schemas.openxmlformats.org/presentationml/2006/main">
   <p:cSld>
     <p:bg>
@@ -23855,211 +24254,6 @@
     <p:extLst>
       <p:ext uri="{BB962C8B-B14F-4D97-AF65-F5344CB8AC3E}">
         <p14:creationId xmlns:p14="http://schemas.microsoft.com/office/powerpoint/2010/main" val="1222602898"/>
-      </p:ext>
-    </p:extLst>
-  </p:cSld>
-  <p:clrMapOvr>
-    <a:masterClrMapping/>
-  </p:clrMapOvr>
-</p:sld>
-</file>
-
-<file path=ppt/slides/slide19.xml><?xml version="1.0" encoding="utf-8"?>
-<p:sld xmlns:a="http://schemas.openxmlformats.org/drawingml/2006/main" xmlns:r="http://schemas.openxmlformats.org/officeDocument/2006/relationships" xmlns:p="http://schemas.openxmlformats.org/presentationml/2006/main">
-  <p:cSld>
-    <p:bg>
-      <p:bgPr>
-        <a:solidFill>
-          <a:schemeClr val="bg1"/>
-        </a:solidFill>
-        <a:effectLst/>
-      </p:bgPr>
-    </p:bg>
-    <p:spTree>
-      <p:nvGrpSpPr>
-        <p:cNvPr id="1" name=""/>
-        <p:cNvGrpSpPr/>
-        <p:nvPr/>
-      </p:nvGrpSpPr>
-      <p:grpSpPr>
-        <a:xfrm>
-          <a:off x="0" y="0"/>
-          <a:ext cx="0" cy="0"/>
-          <a:chOff x="0" y="0"/>
-          <a:chExt cx="0" cy="0"/>
-        </a:xfrm>
-      </p:grpSpPr>
-      <p:sp>
-        <p:nvSpPr>
-          <p:cNvPr id="10" name="Rectangle 9">
-            <a:extLst>
-              <a:ext uri="{FF2B5EF4-FFF2-40B4-BE49-F238E27FC236}">
-                <a16:creationId xmlns:a16="http://schemas.microsoft.com/office/drawing/2014/main" id="{32BC26D8-82FB-445E-AA49-62A77D7C1EE0}"/>
-              </a:ext>
-              <a:ext uri="{C183D7F6-B498-43B3-948B-1728B52AA6E4}">
-                <adec:decorative xmlns:adec="http://schemas.microsoft.com/office/drawing/2017/decorative" val="1"/>
-              </a:ext>
-            </a:extLst>
-          </p:cNvPr>
-          <p:cNvSpPr>
-            <a:spLocks noGrp="1" noRot="1" noChangeAspect="1" noMove="1" noResize="1" noEditPoints="1" noAdjustHandles="1" noChangeArrowheads="1" noChangeShapeType="1" noTextEdit="1"/>
-          </p:cNvSpPr>
-          <p:nvPr>
-            <p:extLst>
-              <p:ext uri="{386F3935-93C4-4BCD-93E2-E3B085C9AB24}">
-                <p16:designElem xmlns:p16="http://schemas.microsoft.com/office/powerpoint/2015/main" val="1"/>
-              </p:ext>
-            </p:extLst>
-          </p:nvPr>
-        </p:nvSpPr>
-        <p:spPr>
-          <a:xfrm>
-            <a:off x="0" y="0"/>
-            <a:ext cx="12192000" cy="6858000"/>
-          </a:xfrm>
-          <a:prstGeom prst="rect">
-            <a:avLst/>
-          </a:prstGeom>
-          <a:solidFill>
-            <a:schemeClr val="tx1">
-              <a:lumMod val="65000"/>
-              <a:lumOff val="35000"/>
-            </a:schemeClr>
-          </a:solidFill>
-          <a:ln>
-            <a:noFill/>
-          </a:ln>
-        </p:spPr>
-        <p:style>
-          <a:lnRef idx="2">
-            <a:schemeClr val="accent1">
-              <a:shade val="50000"/>
-            </a:schemeClr>
-          </a:lnRef>
-          <a:fillRef idx="1">
-            <a:schemeClr val="accent1"/>
-          </a:fillRef>
-          <a:effectRef idx="0">
-            <a:schemeClr val="accent1"/>
-          </a:effectRef>
-          <a:fontRef idx="minor">
-            <a:schemeClr val="lt1"/>
-          </a:fontRef>
-        </p:style>
-        <p:txBody>
-          <a:bodyPr rtlCol="0" anchor="ctr"/>
-          <a:lstStyle/>
-          <a:p>
-            <a:pPr algn="ctr"/>
-            <a:endParaRPr lang="en-US"/>
-          </a:p>
-        </p:txBody>
-      </p:sp>
-      <p:sp>
-        <p:nvSpPr>
-          <p:cNvPr id="12" name="Rectangle 11">
-            <a:extLst>
-              <a:ext uri="{FF2B5EF4-FFF2-40B4-BE49-F238E27FC236}">
-                <a16:creationId xmlns:a16="http://schemas.microsoft.com/office/drawing/2014/main" id="{CB44330D-EA18-4254-AA95-EB49948539B8}"/>
-              </a:ext>
-              <a:ext uri="{C183D7F6-B498-43B3-948B-1728B52AA6E4}">
-                <adec:decorative xmlns:adec="http://schemas.microsoft.com/office/drawing/2017/decorative" val="1"/>
-              </a:ext>
-            </a:extLst>
-          </p:cNvPr>
-          <p:cNvSpPr>
-            <a:spLocks noGrp="1" noRot="1" noChangeAspect="1" noMove="1" noResize="1" noEditPoints="1" noAdjustHandles="1" noChangeArrowheads="1" noChangeShapeType="1" noTextEdit="1"/>
-          </p:cNvSpPr>
-          <p:nvPr>
-            <p:extLst>
-              <p:ext uri="{386F3935-93C4-4BCD-93E2-E3B085C9AB24}">
-                <p16:designElem xmlns:p16="http://schemas.microsoft.com/office/powerpoint/2015/main" val="1"/>
-              </p:ext>
-            </p:extLst>
-          </p:nvPr>
-        </p:nvSpPr>
-        <p:spPr>
-          <a:xfrm>
-            <a:off x="477012" y="480060"/>
-            <a:ext cx="11237976" cy="5897880"/>
-          </a:xfrm>
-          <a:prstGeom prst="rect">
-            <a:avLst/>
-          </a:prstGeom>
-          <a:solidFill>
-            <a:srgbClr val="FFFFFF"/>
-          </a:solidFill>
-          <a:ln>
-            <a:noFill/>
-          </a:ln>
-        </p:spPr>
-        <p:style>
-          <a:lnRef idx="2">
-            <a:schemeClr val="accent1">
-              <a:shade val="50000"/>
-            </a:schemeClr>
-          </a:lnRef>
-          <a:fillRef idx="1">
-            <a:schemeClr val="accent1"/>
-          </a:fillRef>
-          <a:effectRef idx="0">
-            <a:schemeClr val="accent1"/>
-          </a:effectRef>
-          <a:fontRef idx="minor">
-            <a:schemeClr val="lt1"/>
-          </a:fontRef>
-        </p:style>
-        <p:txBody>
-          <a:bodyPr rtlCol="0" anchor="ctr"/>
-          <a:lstStyle/>
-          <a:p>
-            <a:pPr algn="ctr"/>
-            <a:endParaRPr lang="en-US"/>
-          </a:p>
-        </p:txBody>
-      </p:sp>
-      <p:pic>
-        <p:nvPicPr>
-          <p:cNvPr id="5" name="Content Placeholder 4" descr="A chart with a blue arrow and green rectangles&#10;&#10;AI-generated content may be incorrect.">
-            <a:extLst>
-              <a:ext uri="{FF2B5EF4-FFF2-40B4-BE49-F238E27FC236}">
-                <a16:creationId xmlns:a16="http://schemas.microsoft.com/office/drawing/2014/main" id="{E4F22628-2900-78BD-4264-B18143F987D4}"/>
-              </a:ext>
-            </a:extLst>
-          </p:cNvPr>
-          <p:cNvPicPr>
-            <a:picLocks noGrp="1" noChangeAspect="1"/>
-          </p:cNvPicPr>
-          <p:nvPr>
-            <p:ph idx="1"/>
-          </p:nvPr>
-        </p:nvPicPr>
-        <p:blipFill>
-          <a:blip r:embed="rId2">
-            <a:extLst>
-              <a:ext uri="{28A0092B-C50C-407E-A947-70E740481C1C}">
-                <a14:useLocalDpi xmlns:a14="http://schemas.microsoft.com/office/drawing/2010/main" val="0"/>
-              </a:ext>
-            </a:extLst>
-          </a:blip>
-          <a:stretch>
-            <a:fillRect/>
-          </a:stretch>
-        </p:blipFill>
-        <p:spPr>
-          <a:xfrm>
-            <a:off x="643467" y="1363955"/>
-            <a:ext cx="10905066" cy="4130090"/>
-          </a:xfrm>
-          <a:prstGeom prst="rect">
-            <a:avLst/>
-          </a:prstGeom>
-        </p:spPr>
-      </p:pic>
-    </p:spTree>
-    <p:extLst>
-      <p:ext uri="{BB962C8B-B14F-4D97-AF65-F5344CB8AC3E}">
-        <p14:creationId xmlns:p14="http://schemas.microsoft.com/office/powerpoint/2010/main" val="3437496809"/>
       </p:ext>
     </p:extLst>
   </p:cSld>
@@ -24689,6 +24883,211 @@
 </file>
 
 <file path=ppt/slides/slide20.xml><?xml version="1.0" encoding="utf-8"?>
+<p:sld xmlns:a="http://schemas.openxmlformats.org/drawingml/2006/main" xmlns:r="http://schemas.openxmlformats.org/officeDocument/2006/relationships" xmlns:p="http://schemas.openxmlformats.org/presentationml/2006/main">
+  <p:cSld>
+    <p:bg>
+      <p:bgPr>
+        <a:solidFill>
+          <a:schemeClr val="bg1"/>
+        </a:solidFill>
+        <a:effectLst/>
+      </p:bgPr>
+    </p:bg>
+    <p:spTree>
+      <p:nvGrpSpPr>
+        <p:cNvPr id="1" name=""/>
+        <p:cNvGrpSpPr/>
+        <p:nvPr/>
+      </p:nvGrpSpPr>
+      <p:grpSpPr>
+        <a:xfrm>
+          <a:off x="0" y="0"/>
+          <a:ext cx="0" cy="0"/>
+          <a:chOff x="0" y="0"/>
+          <a:chExt cx="0" cy="0"/>
+        </a:xfrm>
+      </p:grpSpPr>
+      <p:sp>
+        <p:nvSpPr>
+          <p:cNvPr id="10" name="Rectangle 9">
+            <a:extLst>
+              <a:ext uri="{FF2B5EF4-FFF2-40B4-BE49-F238E27FC236}">
+                <a16:creationId xmlns:a16="http://schemas.microsoft.com/office/drawing/2014/main" id="{32BC26D8-82FB-445E-AA49-62A77D7C1EE0}"/>
+              </a:ext>
+              <a:ext uri="{C183D7F6-B498-43B3-948B-1728B52AA6E4}">
+                <adec:decorative xmlns:adec="http://schemas.microsoft.com/office/drawing/2017/decorative" val="1"/>
+              </a:ext>
+            </a:extLst>
+          </p:cNvPr>
+          <p:cNvSpPr>
+            <a:spLocks noGrp="1" noRot="1" noChangeAspect="1" noMove="1" noResize="1" noEditPoints="1" noAdjustHandles="1" noChangeArrowheads="1" noChangeShapeType="1" noTextEdit="1"/>
+          </p:cNvSpPr>
+          <p:nvPr>
+            <p:extLst>
+              <p:ext uri="{386F3935-93C4-4BCD-93E2-E3B085C9AB24}">
+                <p16:designElem xmlns:p16="http://schemas.microsoft.com/office/powerpoint/2015/main" val="1"/>
+              </p:ext>
+            </p:extLst>
+          </p:nvPr>
+        </p:nvSpPr>
+        <p:spPr>
+          <a:xfrm>
+            <a:off x="0" y="0"/>
+            <a:ext cx="12192000" cy="6858000"/>
+          </a:xfrm>
+          <a:prstGeom prst="rect">
+            <a:avLst/>
+          </a:prstGeom>
+          <a:solidFill>
+            <a:schemeClr val="tx1">
+              <a:lumMod val="65000"/>
+              <a:lumOff val="35000"/>
+            </a:schemeClr>
+          </a:solidFill>
+          <a:ln>
+            <a:noFill/>
+          </a:ln>
+        </p:spPr>
+        <p:style>
+          <a:lnRef idx="2">
+            <a:schemeClr val="accent1">
+              <a:shade val="50000"/>
+            </a:schemeClr>
+          </a:lnRef>
+          <a:fillRef idx="1">
+            <a:schemeClr val="accent1"/>
+          </a:fillRef>
+          <a:effectRef idx="0">
+            <a:schemeClr val="accent1"/>
+          </a:effectRef>
+          <a:fontRef idx="minor">
+            <a:schemeClr val="lt1"/>
+          </a:fontRef>
+        </p:style>
+        <p:txBody>
+          <a:bodyPr rtlCol="0" anchor="ctr"/>
+          <a:lstStyle/>
+          <a:p>
+            <a:pPr algn="ctr"/>
+            <a:endParaRPr lang="en-US"/>
+          </a:p>
+        </p:txBody>
+      </p:sp>
+      <p:sp>
+        <p:nvSpPr>
+          <p:cNvPr id="12" name="Rectangle 11">
+            <a:extLst>
+              <a:ext uri="{FF2B5EF4-FFF2-40B4-BE49-F238E27FC236}">
+                <a16:creationId xmlns:a16="http://schemas.microsoft.com/office/drawing/2014/main" id="{CB44330D-EA18-4254-AA95-EB49948539B8}"/>
+              </a:ext>
+              <a:ext uri="{C183D7F6-B498-43B3-948B-1728B52AA6E4}">
+                <adec:decorative xmlns:adec="http://schemas.microsoft.com/office/drawing/2017/decorative" val="1"/>
+              </a:ext>
+            </a:extLst>
+          </p:cNvPr>
+          <p:cNvSpPr>
+            <a:spLocks noGrp="1" noRot="1" noChangeAspect="1" noMove="1" noResize="1" noEditPoints="1" noAdjustHandles="1" noChangeArrowheads="1" noChangeShapeType="1" noTextEdit="1"/>
+          </p:cNvSpPr>
+          <p:nvPr>
+            <p:extLst>
+              <p:ext uri="{386F3935-93C4-4BCD-93E2-E3B085C9AB24}">
+                <p16:designElem xmlns:p16="http://schemas.microsoft.com/office/powerpoint/2015/main" val="1"/>
+              </p:ext>
+            </p:extLst>
+          </p:nvPr>
+        </p:nvSpPr>
+        <p:spPr>
+          <a:xfrm>
+            <a:off x="477012" y="480060"/>
+            <a:ext cx="11237976" cy="5897880"/>
+          </a:xfrm>
+          <a:prstGeom prst="rect">
+            <a:avLst/>
+          </a:prstGeom>
+          <a:solidFill>
+            <a:srgbClr val="FFFFFF"/>
+          </a:solidFill>
+          <a:ln>
+            <a:noFill/>
+          </a:ln>
+        </p:spPr>
+        <p:style>
+          <a:lnRef idx="2">
+            <a:schemeClr val="accent1">
+              <a:shade val="50000"/>
+            </a:schemeClr>
+          </a:lnRef>
+          <a:fillRef idx="1">
+            <a:schemeClr val="accent1"/>
+          </a:fillRef>
+          <a:effectRef idx="0">
+            <a:schemeClr val="accent1"/>
+          </a:effectRef>
+          <a:fontRef idx="minor">
+            <a:schemeClr val="lt1"/>
+          </a:fontRef>
+        </p:style>
+        <p:txBody>
+          <a:bodyPr rtlCol="0" anchor="ctr"/>
+          <a:lstStyle/>
+          <a:p>
+            <a:pPr algn="ctr"/>
+            <a:endParaRPr lang="en-US"/>
+          </a:p>
+        </p:txBody>
+      </p:sp>
+      <p:pic>
+        <p:nvPicPr>
+          <p:cNvPr id="5" name="Content Placeholder 4" descr="A chart with a blue arrow and green rectangles&#10;&#10;AI-generated content may be incorrect.">
+            <a:extLst>
+              <a:ext uri="{FF2B5EF4-FFF2-40B4-BE49-F238E27FC236}">
+                <a16:creationId xmlns:a16="http://schemas.microsoft.com/office/drawing/2014/main" id="{E4F22628-2900-78BD-4264-B18143F987D4}"/>
+              </a:ext>
+            </a:extLst>
+          </p:cNvPr>
+          <p:cNvPicPr>
+            <a:picLocks noGrp="1" noChangeAspect="1"/>
+          </p:cNvPicPr>
+          <p:nvPr>
+            <p:ph idx="1"/>
+          </p:nvPr>
+        </p:nvPicPr>
+        <p:blipFill>
+          <a:blip r:embed="rId2">
+            <a:extLst>
+              <a:ext uri="{28A0092B-C50C-407E-A947-70E740481C1C}">
+                <a14:useLocalDpi xmlns:a14="http://schemas.microsoft.com/office/drawing/2010/main" val="0"/>
+              </a:ext>
+            </a:extLst>
+          </a:blip>
+          <a:stretch>
+            <a:fillRect/>
+          </a:stretch>
+        </p:blipFill>
+        <p:spPr>
+          <a:xfrm>
+            <a:off x="643467" y="1363955"/>
+            <a:ext cx="10905066" cy="4130090"/>
+          </a:xfrm>
+          <a:prstGeom prst="rect">
+            <a:avLst/>
+          </a:prstGeom>
+        </p:spPr>
+      </p:pic>
+    </p:spTree>
+    <p:extLst>
+      <p:ext uri="{BB962C8B-B14F-4D97-AF65-F5344CB8AC3E}">
+        <p14:creationId xmlns:p14="http://schemas.microsoft.com/office/powerpoint/2010/main" val="3437496809"/>
+      </p:ext>
+    </p:extLst>
+  </p:cSld>
+  <p:clrMapOvr>
+    <a:masterClrMapping/>
+  </p:clrMapOvr>
+</p:sld>
+</file>
+
+<file path=ppt/slides/slide21.xml><?xml version="1.0" encoding="utf-8"?>
 <p:sld xmlns:a="http://schemas.openxmlformats.org/drawingml/2006/main" xmlns:r="http://schemas.openxmlformats.org/officeDocument/2006/relationships" xmlns:p="http://schemas.openxmlformats.org/presentationml/2006/main">
   <p:cSld>
     <p:bg>
@@ -25391,7 +25790,7 @@
 </p:sld>
 </file>
 
-<file path=ppt/slides/slide21.xml><?xml version="1.0" encoding="utf-8"?>
+<file path=ppt/slides/slide22.xml><?xml version="1.0" encoding="utf-8"?>
 <p:sld xmlns:a="http://schemas.openxmlformats.org/drawingml/2006/main" xmlns:r="http://schemas.openxmlformats.org/officeDocument/2006/relationships" xmlns:p="http://schemas.openxmlformats.org/presentationml/2006/main">
   <p:cSld>
     <p:bg>
@@ -26083,7 +26482,7 @@
 </p:sld>
 </file>
 
-<file path=ppt/slides/slide22.xml><?xml version="1.0" encoding="utf-8"?>
+<file path=ppt/slides/slide23.xml><?xml version="1.0" encoding="utf-8"?>
 <p:sld xmlns:a="http://schemas.openxmlformats.org/drawingml/2006/main" xmlns:r="http://schemas.openxmlformats.org/officeDocument/2006/relationships" xmlns:p="http://schemas.openxmlformats.org/presentationml/2006/main">
   <p:cSld>
     <p:spTree>
@@ -26176,7 +26575,7 @@
 </p:sld>
 </file>
 
-<file path=ppt/slides/slide23.xml><?xml version="1.0" encoding="utf-8"?>
+<file path=ppt/slides/slide24.xml><?xml version="1.0" encoding="utf-8"?>
 <p:sld xmlns:a="http://schemas.openxmlformats.org/drawingml/2006/main" xmlns:r="http://schemas.openxmlformats.org/officeDocument/2006/relationships" xmlns:p="http://schemas.openxmlformats.org/presentationml/2006/main">
   <p:cSld>
     <p:spTree>
@@ -26269,7 +26668,7 @@
 </p:sld>
 </file>
 
-<file path=ppt/slides/slide24.xml><?xml version="1.0" encoding="utf-8"?>
+<file path=ppt/slides/slide25.xml><?xml version="1.0" encoding="utf-8"?>
 <p:sld xmlns:a="http://schemas.openxmlformats.org/drawingml/2006/main" xmlns:r="http://schemas.openxmlformats.org/officeDocument/2006/relationships" xmlns:p="http://schemas.openxmlformats.org/presentationml/2006/main">
   <p:cSld>
     <p:spTree>
@@ -26339,7 +26738,7 @@
 </p:sld>
 </file>
 
-<file path=ppt/slides/slide25.xml><?xml version="1.0" encoding="utf-8"?>
+<file path=ppt/slides/slide26.xml><?xml version="1.0" encoding="utf-8"?>
 <p:sld xmlns:a="http://schemas.openxmlformats.org/drawingml/2006/main" xmlns:r="http://schemas.openxmlformats.org/officeDocument/2006/relationships" xmlns:p="http://schemas.openxmlformats.org/presentationml/2006/main">
   <p:cSld>
     <p:bg>
@@ -26906,7 +27305,7 @@
 </p:sld>
 </file>
 
-<file path=ppt/slides/slide26.xml><?xml version="1.0" encoding="utf-8"?>
+<file path=ppt/slides/slide27.xml><?xml version="1.0" encoding="utf-8"?>
 <p:sld xmlns:a="http://schemas.openxmlformats.org/drawingml/2006/main" xmlns:r="http://schemas.openxmlformats.org/officeDocument/2006/relationships" xmlns:p="http://schemas.openxmlformats.org/presentationml/2006/main">
   <p:cSld>
     <p:bg>
@@ -27175,7 +27574,7 @@
 </p:sld>
 </file>
 
-<file path=ppt/slides/slide27.xml><?xml version="1.0" encoding="utf-8"?>
+<file path=ppt/slides/slide28.xml><?xml version="1.0" encoding="utf-8"?>
 <p:sld xmlns:a="http://schemas.openxmlformats.org/drawingml/2006/main" xmlns:r="http://schemas.openxmlformats.org/officeDocument/2006/relationships" xmlns:p="http://schemas.openxmlformats.org/presentationml/2006/main">
   <p:cSld>
     <p:bg>
@@ -27661,7 +28060,7 @@
 </p:sld>
 </file>
 
-<file path=ppt/slides/slide28.xml><?xml version="1.0" encoding="utf-8"?>
+<file path=ppt/slides/slide29.xml><?xml version="1.0" encoding="utf-8"?>
 <p:sld xmlns:a="http://schemas.openxmlformats.org/drawingml/2006/main" xmlns:r="http://schemas.openxmlformats.org/officeDocument/2006/relationships" xmlns:p="http://schemas.openxmlformats.org/presentationml/2006/main">
   <p:cSld>
     <p:spTree>
@@ -27830,71 +28229,6 @@
     <p:extLst>
       <p:ext uri="{BB962C8B-B14F-4D97-AF65-F5344CB8AC3E}">
         <p14:creationId xmlns:p14="http://schemas.microsoft.com/office/powerpoint/2010/main" val="2231824513"/>
-      </p:ext>
-    </p:extLst>
-  </p:cSld>
-  <p:clrMapOvr>
-    <a:masterClrMapping/>
-  </p:clrMapOvr>
-</p:sld>
-</file>
-
-<file path=ppt/slides/slide29.xml><?xml version="1.0" encoding="utf-8"?>
-<p:sld xmlns:a="http://schemas.openxmlformats.org/drawingml/2006/main" xmlns:r="http://schemas.openxmlformats.org/officeDocument/2006/relationships" xmlns:p="http://schemas.openxmlformats.org/presentationml/2006/main">
-  <p:cSld>
-    <p:spTree>
-      <p:nvGrpSpPr>
-        <p:cNvPr id="1" name=""/>
-        <p:cNvGrpSpPr/>
-        <p:nvPr/>
-      </p:nvGrpSpPr>
-      <p:grpSpPr>
-        <a:xfrm>
-          <a:off x="0" y="0"/>
-          <a:ext cx="0" cy="0"/>
-          <a:chOff x="0" y="0"/>
-          <a:chExt cx="0" cy="0"/>
-        </a:xfrm>
-      </p:grpSpPr>
-      <p:pic>
-        <p:nvPicPr>
-          <p:cNvPr id="5" name="Content Placeholder 4" descr="A diagram of a tree&#10;&#10;AI-generated content may be incorrect.">
-            <a:extLst>
-              <a:ext uri="{FF2B5EF4-FFF2-40B4-BE49-F238E27FC236}">
-                <a16:creationId xmlns:a16="http://schemas.microsoft.com/office/drawing/2014/main" id="{322F7935-AC6A-5598-C52F-58A775EEB0E7}"/>
-              </a:ext>
-            </a:extLst>
-          </p:cNvPr>
-          <p:cNvPicPr>
-            <a:picLocks noGrp="1" noChangeAspect="1"/>
-          </p:cNvPicPr>
-          <p:nvPr>
-            <p:ph idx="1"/>
-          </p:nvPr>
-        </p:nvPicPr>
-        <p:blipFill>
-          <a:blip r:embed="rId2">
-            <a:extLst>
-              <a:ext uri="{28A0092B-C50C-407E-A947-70E740481C1C}">
-                <a14:useLocalDpi xmlns:a14="http://schemas.microsoft.com/office/drawing/2010/main" val="0"/>
-              </a:ext>
-            </a:extLst>
-          </a:blip>
-          <a:stretch>
-            <a:fillRect/>
-          </a:stretch>
-        </p:blipFill>
-        <p:spPr>
-          <a:xfrm>
-            <a:off x="2168741" y="734853"/>
-            <a:ext cx="7854517" cy="5388293"/>
-          </a:xfrm>
-        </p:spPr>
-      </p:pic>
-    </p:spTree>
-    <p:extLst>
-      <p:ext uri="{BB962C8B-B14F-4D97-AF65-F5344CB8AC3E}">
-        <p14:creationId xmlns:p14="http://schemas.microsoft.com/office/powerpoint/2010/main" val="2660769129"/>
       </p:ext>
     </p:extLst>
   </p:cSld>
@@ -28189,6 +28523,71 @@
   <p:cSld>
     <p:spTree>
       <p:nvGrpSpPr>
+        <p:cNvPr id="1" name=""/>
+        <p:cNvGrpSpPr/>
+        <p:nvPr/>
+      </p:nvGrpSpPr>
+      <p:grpSpPr>
+        <a:xfrm>
+          <a:off x="0" y="0"/>
+          <a:ext cx="0" cy="0"/>
+          <a:chOff x="0" y="0"/>
+          <a:chExt cx="0" cy="0"/>
+        </a:xfrm>
+      </p:grpSpPr>
+      <p:pic>
+        <p:nvPicPr>
+          <p:cNvPr id="5" name="Content Placeholder 4" descr="A diagram of a tree&#10;&#10;AI-generated content may be incorrect.">
+            <a:extLst>
+              <a:ext uri="{FF2B5EF4-FFF2-40B4-BE49-F238E27FC236}">
+                <a16:creationId xmlns:a16="http://schemas.microsoft.com/office/drawing/2014/main" id="{322F7935-AC6A-5598-C52F-58A775EEB0E7}"/>
+              </a:ext>
+            </a:extLst>
+          </p:cNvPr>
+          <p:cNvPicPr>
+            <a:picLocks noGrp="1" noChangeAspect="1"/>
+          </p:cNvPicPr>
+          <p:nvPr>
+            <p:ph idx="1"/>
+          </p:nvPr>
+        </p:nvPicPr>
+        <p:blipFill>
+          <a:blip r:embed="rId2">
+            <a:extLst>
+              <a:ext uri="{28A0092B-C50C-407E-A947-70E740481C1C}">
+                <a14:useLocalDpi xmlns:a14="http://schemas.microsoft.com/office/drawing/2010/main" val="0"/>
+              </a:ext>
+            </a:extLst>
+          </a:blip>
+          <a:stretch>
+            <a:fillRect/>
+          </a:stretch>
+        </p:blipFill>
+        <p:spPr>
+          <a:xfrm>
+            <a:off x="2168741" y="734853"/>
+            <a:ext cx="7854517" cy="5388293"/>
+          </a:xfrm>
+        </p:spPr>
+      </p:pic>
+    </p:spTree>
+    <p:extLst>
+      <p:ext uri="{BB962C8B-B14F-4D97-AF65-F5344CB8AC3E}">
+        <p14:creationId xmlns:p14="http://schemas.microsoft.com/office/powerpoint/2010/main" val="2660769129"/>
+      </p:ext>
+    </p:extLst>
+  </p:cSld>
+  <p:clrMapOvr>
+    <a:masterClrMapping/>
+  </p:clrMapOvr>
+</p:sld>
+</file>
+
+<file path=ppt/slides/slide31.xml><?xml version="1.0" encoding="utf-8"?>
+<p:sld xmlns:a="http://schemas.openxmlformats.org/drawingml/2006/main" xmlns:r="http://schemas.openxmlformats.org/officeDocument/2006/relationships" xmlns:p="http://schemas.openxmlformats.org/presentationml/2006/main">
+  <p:cSld>
+    <p:spTree>
+      <p:nvGrpSpPr>
         <p:cNvPr id="1" name="">
           <a:extLst>
             <a:ext uri="{FF2B5EF4-FFF2-40B4-BE49-F238E27FC236}">
@@ -28254,7 +28653,7 @@
 </p:sld>
 </file>
 
-<file path=ppt/slides/slide31.xml><?xml version="1.0" encoding="utf-8"?>
+<file path=ppt/slides/slide32.xml><?xml version="1.0" encoding="utf-8"?>
 <p:sld xmlns:a="http://schemas.openxmlformats.org/drawingml/2006/main" xmlns:r="http://schemas.openxmlformats.org/officeDocument/2006/relationships" xmlns:p="http://schemas.openxmlformats.org/presentationml/2006/main">
   <p:cSld>
     <p:spTree>
@@ -28324,7 +28723,7 @@
 </p:sld>
 </file>
 
-<file path=ppt/slides/slide32.xml><?xml version="1.0" encoding="utf-8"?>
+<file path=ppt/slides/slide33.xml><?xml version="1.0" encoding="utf-8"?>
 <p:sld xmlns:a="http://schemas.openxmlformats.org/drawingml/2006/main" xmlns:r="http://schemas.openxmlformats.org/officeDocument/2006/relationships" xmlns:p="http://schemas.openxmlformats.org/presentationml/2006/main">
   <p:cSld>
     <p:spTree>
@@ -28394,7 +28793,7 @@
 </p:sld>
 </file>
 
-<file path=ppt/slides/slide33.xml><?xml version="1.0" encoding="utf-8"?>
+<file path=ppt/slides/slide34.xml><?xml version="1.0" encoding="utf-8"?>
 <p:sld xmlns:a="http://schemas.openxmlformats.org/drawingml/2006/main" xmlns:r="http://schemas.openxmlformats.org/officeDocument/2006/relationships" xmlns:p="http://schemas.openxmlformats.org/presentationml/2006/main">
   <p:cSld>
     <p:spTree>
@@ -28464,7 +28863,7 @@
 </p:sld>
 </file>
 
-<file path=ppt/slides/slide34.xml><?xml version="1.0" encoding="utf-8"?>
+<file path=ppt/slides/slide35.xml><?xml version="1.0" encoding="utf-8"?>
 <p:sld xmlns:a="http://schemas.openxmlformats.org/drawingml/2006/main" xmlns:r="http://schemas.openxmlformats.org/officeDocument/2006/relationships" xmlns:p="http://schemas.openxmlformats.org/presentationml/2006/main">
   <p:cSld>
     <p:spTree>
@@ -28534,7 +28933,7 @@
 </p:sld>
 </file>
 
-<file path=ppt/slides/slide35.xml><?xml version="1.0" encoding="utf-8"?>
+<file path=ppt/slides/slide36.xml><?xml version="1.0" encoding="utf-8"?>
 <p:sld xmlns:a="http://schemas.openxmlformats.org/drawingml/2006/main" xmlns:r="http://schemas.openxmlformats.org/officeDocument/2006/relationships" xmlns:p="http://schemas.openxmlformats.org/presentationml/2006/main">
   <p:cSld>
     <p:spTree>
@@ -28604,7 +29003,7 @@
 </p:sld>
 </file>
 
-<file path=ppt/slides/slide36.xml><?xml version="1.0" encoding="utf-8"?>
+<file path=ppt/slides/slide37.xml><?xml version="1.0" encoding="utf-8"?>
 <p:sld xmlns:a="http://schemas.openxmlformats.org/drawingml/2006/main" xmlns:r="http://schemas.openxmlformats.org/officeDocument/2006/relationships" xmlns:p="http://schemas.openxmlformats.org/presentationml/2006/main">
   <p:cSld>
     <p:spTree>
@@ -28674,7 +29073,7 @@
 </p:sld>
 </file>
 
-<file path=ppt/slides/slide37.xml><?xml version="1.0" encoding="utf-8"?>
+<file path=ppt/slides/slide38.xml><?xml version="1.0" encoding="utf-8"?>
 <p:sld xmlns:a="http://schemas.openxmlformats.org/drawingml/2006/main" xmlns:r="http://schemas.openxmlformats.org/officeDocument/2006/relationships" xmlns:p="http://schemas.openxmlformats.org/presentationml/2006/main">
   <p:cSld>
     <p:spTree>
@@ -28744,7 +29143,7 @@
 </p:sld>
 </file>
 
-<file path=ppt/slides/slide38.xml><?xml version="1.0" encoding="utf-8"?>
+<file path=ppt/slides/slide39.xml><?xml version="1.0" encoding="utf-8"?>
 <p:sld xmlns:a="http://schemas.openxmlformats.org/drawingml/2006/main" xmlns:r="http://schemas.openxmlformats.org/officeDocument/2006/relationships" xmlns:p="http://schemas.openxmlformats.org/presentationml/2006/main">
   <p:cSld>
     <p:spTree>
@@ -28805,76 +29204,6 @@
     <p:extLst>
       <p:ext uri="{BB962C8B-B14F-4D97-AF65-F5344CB8AC3E}">
         <p14:creationId xmlns:p14="http://schemas.microsoft.com/office/powerpoint/2010/main" val="2653031513"/>
-      </p:ext>
-    </p:extLst>
-  </p:cSld>
-  <p:clrMapOvr>
-    <a:masterClrMapping/>
-  </p:clrMapOvr>
-</p:sld>
-</file>
-
-<file path=ppt/slides/slide39.xml><?xml version="1.0" encoding="utf-8"?>
-<p:sld xmlns:a="http://schemas.openxmlformats.org/drawingml/2006/main" xmlns:r="http://schemas.openxmlformats.org/officeDocument/2006/relationships" xmlns:p="http://schemas.openxmlformats.org/presentationml/2006/main">
-  <p:cSld>
-    <p:spTree>
-      <p:nvGrpSpPr>
-        <p:cNvPr id="1" name="">
-          <a:extLst>
-            <a:ext uri="{FF2B5EF4-FFF2-40B4-BE49-F238E27FC236}">
-              <a16:creationId xmlns:a16="http://schemas.microsoft.com/office/drawing/2014/main" id="{ED3CA392-3CD0-39F8-1310-2C982474A95F}"/>
-            </a:ext>
-          </a:extLst>
-        </p:cNvPr>
-        <p:cNvGrpSpPr/>
-        <p:nvPr/>
-      </p:nvGrpSpPr>
-      <p:grpSpPr>
-        <a:xfrm>
-          <a:off x="0" y="0"/>
-          <a:ext cx="0" cy="0"/>
-          <a:chOff x="0" y="0"/>
-          <a:chExt cx="0" cy="0"/>
-        </a:xfrm>
-      </p:grpSpPr>
-      <p:pic>
-        <p:nvPicPr>
-          <p:cNvPr id="5" name="Content Placeholder 4">
-            <a:extLst>
-              <a:ext uri="{FF2B5EF4-FFF2-40B4-BE49-F238E27FC236}">
-                <a16:creationId xmlns:a16="http://schemas.microsoft.com/office/drawing/2014/main" id="{2AC53CAB-7106-D037-3772-84EE2540B819}"/>
-              </a:ext>
-            </a:extLst>
-          </p:cNvPr>
-          <p:cNvPicPr>
-            <a:picLocks noGrp="1" noChangeAspect="1"/>
-          </p:cNvPicPr>
-          <p:nvPr>
-            <p:ph idx="1"/>
-          </p:nvPr>
-        </p:nvPicPr>
-        <p:blipFill>
-          <a:blip r:embed="rId2">
-            <a:extLst>
-              <a:ext uri="{28A0092B-C50C-407E-A947-70E740481C1C}">
-                <a14:useLocalDpi xmlns:a14="http://schemas.microsoft.com/office/drawing/2010/main" val="0"/>
-              </a:ext>
-            </a:extLst>
-          </a:blip>
-          <a:srcRect/>
-          <a:stretch/>
-        </p:blipFill>
-        <p:spPr>
-          <a:xfrm>
-            <a:off x="2173703" y="164128"/>
-            <a:ext cx="7844593" cy="6529744"/>
-          </a:xfrm>
-        </p:spPr>
-      </p:pic>
-    </p:spTree>
-    <p:extLst>
-      <p:ext uri="{BB962C8B-B14F-4D97-AF65-F5344CB8AC3E}">
-        <p14:creationId xmlns:p14="http://schemas.microsoft.com/office/powerpoint/2010/main" val="1090982240"/>
       </p:ext>
     </p:extLst>
   </p:cSld>
@@ -29140,6 +29469,76 @@
   <p:cSld>
     <p:spTree>
       <p:nvGrpSpPr>
+        <p:cNvPr id="1" name="">
+          <a:extLst>
+            <a:ext uri="{FF2B5EF4-FFF2-40B4-BE49-F238E27FC236}">
+              <a16:creationId xmlns:a16="http://schemas.microsoft.com/office/drawing/2014/main" id="{ED3CA392-3CD0-39F8-1310-2C982474A95F}"/>
+            </a:ext>
+          </a:extLst>
+        </p:cNvPr>
+        <p:cNvGrpSpPr/>
+        <p:nvPr/>
+      </p:nvGrpSpPr>
+      <p:grpSpPr>
+        <a:xfrm>
+          <a:off x="0" y="0"/>
+          <a:ext cx="0" cy="0"/>
+          <a:chOff x="0" y="0"/>
+          <a:chExt cx="0" cy="0"/>
+        </a:xfrm>
+      </p:grpSpPr>
+      <p:pic>
+        <p:nvPicPr>
+          <p:cNvPr id="5" name="Content Placeholder 4">
+            <a:extLst>
+              <a:ext uri="{FF2B5EF4-FFF2-40B4-BE49-F238E27FC236}">
+                <a16:creationId xmlns:a16="http://schemas.microsoft.com/office/drawing/2014/main" id="{2AC53CAB-7106-D037-3772-84EE2540B819}"/>
+              </a:ext>
+            </a:extLst>
+          </p:cNvPr>
+          <p:cNvPicPr>
+            <a:picLocks noGrp="1" noChangeAspect="1"/>
+          </p:cNvPicPr>
+          <p:nvPr>
+            <p:ph idx="1"/>
+          </p:nvPr>
+        </p:nvPicPr>
+        <p:blipFill>
+          <a:blip r:embed="rId2">
+            <a:extLst>
+              <a:ext uri="{28A0092B-C50C-407E-A947-70E740481C1C}">
+                <a14:useLocalDpi xmlns:a14="http://schemas.microsoft.com/office/drawing/2010/main" val="0"/>
+              </a:ext>
+            </a:extLst>
+          </a:blip>
+          <a:srcRect/>
+          <a:stretch/>
+        </p:blipFill>
+        <p:spPr>
+          <a:xfrm>
+            <a:off x="2173703" y="164128"/>
+            <a:ext cx="7844593" cy="6529744"/>
+          </a:xfrm>
+        </p:spPr>
+      </p:pic>
+    </p:spTree>
+    <p:extLst>
+      <p:ext uri="{BB962C8B-B14F-4D97-AF65-F5344CB8AC3E}">
+        <p14:creationId xmlns:p14="http://schemas.microsoft.com/office/powerpoint/2010/main" val="1090982240"/>
+      </p:ext>
+    </p:extLst>
+  </p:cSld>
+  <p:clrMapOvr>
+    <a:masterClrMapping/>
+  </p:clrMapOvr>
+</p:sld>
+</file>
+
+<file path=ppt/slides/slide41.xml><?xml version="1.0" encoding="utf-8"?>
+<p:sld xmlns:a="http://schemas.openxmlformats.org/drawingml/2006/main" xmlns:r="http://schemas.openxmlformats.org/officeDocument/2006/relationships" xmlns:p="http://schemas.openxmlformats.org/presentationml/2006/main">
+  <p:cSld>
+    <p:spTree>
+      <p:nvGrpSpPr>
         <p:cNvPr id="1" name=""/>
         <p:cNvGrpSpPr/>
         <p:nvPr/>
@@ -29227,7 +29626,7 @@
 </p:sld>
 </file>
 
-<file path=ppt/slides/slide41.xml><?xml version="1.0" encoding="utf-8"?>
+<file path=ppt/slides/slide42.xml><?xml version="1.0" encoding="utf-8"?>
 <p:sld xmlns:a="http://schemas.openxmlformats.org/drawingml/2006/main" xmlns:r="http://schemas.openxmlformats.org/officeDocument/2006/relationships" xmlns:p="http://schemas.openxmlformats.org/presentationml/2006/main">
   <p:cSld>
     <p:spTree>
@@ -29272,8 +29671,8 @@
           </a:p>
         </p:txBody>
       </p:sp>
-      <mc:AlternateContent xmlns:mc="http://schemas.openxmlformats.org/markup-compatibility/2006">
-        <mc:Choice xmlns:a14="http://schemas.microsoft.com/office/drawing/2010/main" Requires="a14">
+      <mc:AlternateContent xmlns:mc="http://schemas.openxmlformats.org/markup-compatibility/2006" xmlns:a14="http://schemas.microsoft.com/office/drawing/2010/main">
+        <mc:Choice Requires="a14">
           <p:sp>
             <p:nvSpPr>
               <p:cNvPr id="3" name="Content Placeholder 2">
@@ -29340,7 +29739,7 @@
             </p:txBody>
           </p:sp>
         </mc:Choice>
-        <mc:Fallback>
+        <mc:Fallback xmlns="">
           <p:sp>
             <p:nvSpPr>
               <p:cNvPr id="3" name="Content Placeholder 2">
@@ -29393,7 +29792,7 @@
 </p:sld>
 </file>
 
-<file path=ppt/slides/slide42.xml><?xml version="1.0" encoding="utf-8"?>
+<file path=ppt/slides/slide43.xml><?xml version="1.0" encoding="utf-8"?>
 <p:sld xmlns:a="http://schemas.openxmlformats.org/drawingml/2006/main" xmlns:r="http://schemas.openxmlformats.org/officeDocument/2006/relationships" xmlns:p="http://schemas.openxmlformats.org/presentationml/2006/main">
   <p:cSld>
     <p:spTree>
@@ -29444,8 +29843,8 @@
           </a:p>
         </p:txBody>
       </p:sp>
-      <mc:AlternateContent xmlns:mc="http://schemas.openxmlformats.org/markup-compatibility/2006">
-        <mc:Choice xmlns:a14="http://schemas.microsoft.com/office/drawing/2010/main" Requires="a14">
+      <mc:AlternateContent xmlns:mc="http://schemas.openxmlformats.org/markup-compatibility/2006" xmlns:a14="http://schemas.microsoft.com/office/drawing/2010/main">
+        <mc:Choice Requires="a14">
           <p:sp>
             <p:nvSpPr>
               <p:cNvPr id="3" name="Content Placeholder 2">
@@ -29572,7 +29971,7 @@
             </p:txBody>
           </p:sp>
         </mc:Choice>
-        <mc:Fallback>
+        <mc:Fallback xmlns="">
           <p:sp>
             <p:nvSpPr>
               <p:cNvPr id="3" name="Content Placeholder 2">
@@ -29625,7 +30024,7 @@
 </p:sld>
 </file>
 
-<file path=ppt/slides/slide43.xml><?xml version="1.0" encoding="utf-8"?>
+<file path=ppt/slides/slide44.xml><?xml version="1.0" encoding="utf-8"?>
 <p:sld xmlns:a="http://schemas.openxmlformats.org/drawingml/2006/main" xmlns:r="http://schemas.openxmlformats.org/officeDocument/2006/relationships" xmlns:p="http://schemas.openxmlformats.org/presentationml/2006/main">
   <p:cSld>
     <p:spTree>
@@ -29676,8 +30075,8 @@
           </a:p>
         </p:txBody>
       </p:sp>
-      <mc:AlternateContent xmlns:mc="http://schemas.openxmlformats.org/markup-compatibility/2006">
-        <mc:Choice xmlns:a14="http://schemas.microsoft.com/office/drawing/2010/main" Requires="a14">
+      <mc:AlternateContent xmlns:mc="http://schemas.openxmlformats.org/markup-compatibility/2006" xmlns:a14="http://schemas.microsoft.com/office/drawing/2010/main">
+        <mc:Choice Requires="a14">
           <p:sp>
             <p:nvSpPr>
               <p:cNvPr id="3" name="Content Placeholder 2">
@@ -29873,7 +30272,7 @@
             </p:txBody>
           </p:sp>
         </mc:Choice>
-        <mc:Fallback>
+        <mc:Fallback xmlns="">
           <p:sp>
             <p:nvSpPr>
               <p:cNvPr id="3" name="Content Placeholder 2">
@@ -29926,7 +30325,7 @@
 </p:sld>
 </file>
 
-<file path=ppt/slides/slide44.xml><?xml version="1.0" encoding="utf-8"?>
+<file path=ppt/slides/slide45.xml><?xml version="1.0" encoding="utf-8"?>
 <p:sld xmlns:a="http://schemas.openxmlformats.org/drawingml/2006/main" xmlns:r="http://schemas.openxmlformats.org/officeDocument/2006/relationships" xmlns:p="http://schemas.openxmlformats.org/presentationml/2006/main">
   <p:cSld>
     <p:spTree>
@@ -30240,7 +30639,7 @@
 </p:sld>
 </file>
 
-<file path=ppt/slides/slide45.xml><?xml version="1.0" encoding="utf-8"?>
+<file path=ppt/slides/slide46.xml><?xml version="1.0" encoding="utf-8"?>
 <p:sld xmlns:a="http://schemas.openxmlformats.org/drawingml/2006/main" xmlns:r="http://schemas.openxmlformats.org/officeDocument/2006/relationships" xmlns:p="http://schemas.openxmlformats.org/presentationml/2006/main">
   <p:cSld>
     <p:spTree>
@@ -30379,7 +30778,7 @@
 </p:sld>
 </file>
 
-<file path=ppt/slides/slide46.xml><?xml version="1.0" encoding="utf-8"?>
+<file path=ppt/slides/slide47.xml><?xml version="1.0" encoding="utf-8"?>
 <p:sld xmlns:a="http://schemas.openxmlformats.org/drawingml/2006/main" xmlns:r="http://schemas.openxmlformats.org/officeDocument/2006/relationships" xmlns:p="http://schemas.openxmlformats.org/presentationml/2006/main">
   <p:cSld>
     <p:spTree>
@@ -30513,7 +30912,7 @@
 </p:sld>
 </file>
 
-<file path=ppt/slides/slide47.xml><?xml version="1.0" encoding="utf-8"?>
+<file path=ppt/slides/slide48.xml><?xml version="1.0" encoding="utf-8"?>
 <p:sld xmlns:a="http://schemas.openxmlformats.org/drawingml/2006/main" xmlns:r="http://schemas.openxmlformats.org/officeDocument/2006/relationships" xmlns:p="http://schemas.openxmlformats.org/presentationml/2006/main">
   <p:cSld>
     <p:spTree>
@@ -30611,7 +31010,7 @@
 </p:sld>
 </file>
 
-<file path=ppt/slides/slide48.xml><?xml version="1.0" encoding="utf-8"?>
+<file path=ppt/slides/slide49.xml><?xml version="1.0" encoding="utf-8"?>
 <p:sld xmlns:a="http://schemas.openxmlformats.org/drawingml/2006/main" xmlns:r="http://schemas.openxmlformats.org/officeDocument/2006/relationships" xmlns:p="http://schemas.openxmlformats.org/presentationml/2006/main">
   <p:cSld>
     <p:spTree>
@@ -30672,76 +31071,6 @@
     <p:extLst>
       <p:ext uri="{BB962C8B-B14F-4D97-AF65-F5344CB8AC3E}">
         <p14:creationId xmlns:p14="http://schemas.microsoft.com/office/powerpoint/2010/main" val="3578943928"/>
-      </p:ext>
-    </p:extLst>
-  </p:cSld>
-  <p:clrMapOvr>
-    <a:masterClrMapping/>
-  </p:clrMapOvr>
-</p:sld>
-</file>
-
-<file path=ppt/slides/slide49.xml><?xml version="1.0" encoding="utf-8"?>
-<p:sld xmlns:a="http://schemas.openxmlformats.org/drawingml/2006/main" xmlns:r="http://schemas.openxmlformats.org/officeDocument/2006/relationships" xmlns:p="http://schemas.openxmlformats.org/presentationml/2006/main">
-  <p:cSld>
-    <p:spTree>
-      <p:nvGrpSpPr>
-        <p:cNvPr id="1" name="">
-          <a:extLst>
-            <a:ext uri="{FF2B5EF4-FFF2-40B4-BE49-F238E27FC236}">
-              <a16:creationId xmlns:a16="http://schemas.microsoft.com/office/drawing/2014/main" id="{429B7D71-C9E2-F320-D3A4-163D3F019EE7}"/>
-            </a:ext>
-          </a:extLst>
-        </p:cNvPr>
-        <p:cNvGrpSpPr/>
-        <p:nvPr/>
-      </p:nvGrpSpPr>
-      <p:grpSpPr>
-        <a:xfrm>
-          <a:off x="0" y="0"/>
-          <a:ext cx="0" cy="0"/>
-          <a:chOff x="0" y="0"/>
-          <a:chExt cx="0" cy="0"/>
-        </a:xfrm>
-      </p:grpSpPr>
-      <p:pic>
-        <p:nvPicPr>
-          <p:cNvPr id="5" name="Content Placeholder 4">
-            <a:extLst>
-              <a:ext uri="{FF2B5EF4-FFF2-40B4-BE49-F238E27FC236}">
-                <a16:creationId xmlns:a16="http://schemas.microsoft.com/office/drawing/2014/main" id="{E2A9B330-52D8-DC2A-29D6-6077CA2AB831}"/>
-              </a:ext>
-            </a:extLst>
-          </p:cNvPr>
-          <p:cNvPicPr>
-            <a:picLocks noGrp="1" noChangeAspect="1"/>
-          </p:cNvPicPr>
-          <p:nvPr>
-            <p:ph idx="1"/>
-          </p:nvPr>
-        </p:nvPicPr>
-        <p:blipFill>
-          <a:blip r:embed="rId2">
-            <a:extLst>
-              <a:ext uri="{28A0092B-C50C-407E-A947-70E740481C1C}">
-                <a14:useLocalDpi xmlns:a14="http://schemas.microsoft.com/office/drawing/2010/main" val="0"/>
-              </a:ext>
-            </a:extLst>
-          </a:blip>
-          <a:srcRect/>
-          <a:stretch/>
-        </p:blipFill>
-        <p:spPr>
-          <a:xfrm>
-            <a:off x="3072764" y="268605"/>
-            <a:ext cx="6046471" cy="6320790"/>
-          </a:xfrm>
-        </p:spPr>
-      </p:pic>
-    </p:spTree>
-    <p:extLst>
-      <p:ext uri="{BB962C8B-B14F-4D97-AF65-F5344CB8AC3E}">
-        <p14:creationId xmlns:p14="http://schemas.microsoft.com/office/powerpoint/2010/main" val="3855003021"/>
       </p:ext>
     </p:extLst>
   </p:cSld>
@@ -31207,6 +31536,76 @@
         <p:cNvPr id="1" name="">
           <a:extLst>
             <a:ext uri="{FF2B5EF4-FFF2-40B4-BE49-F238E27FC236}">
+              <a16:creationId xmlns:a16="http://schemas.microsoft.com/office/drawing/2014/main" id="{429B7D71-C9E2-F320-D3A4-163D3F019EE7}"/>
+            </a:ext>
+          </a:extLst>
+        </p:cNvPr>
+        <p:cNvGrpSpPr/>
+        <p:nvPr/>
+      </p:nvGrpSpPr>
+      <p:grpSpPr>
+        <a:xfrm>
+          <a:off x="0" y="0"/>
+          <a:ext cx="0" cy="0"/>
+          <a:chOff x="0" y="0"/>
+          <a:chExt cx="0" cy="0"/>
+        </a:xfrm>
+      </p:grpSpPr>
+      <p:pic>
+        <p:nvPicPr>
+          <p:cNvPr id="5" name="Content Placeholder 4">
+            <a:extLst>
+              <a:ext uri="{FF2B5EF4-FFF2-40B4-BE49-F238E27FC236}">
+                <a16:creationId xmlns:a16="http://schemas.microsoft.com/office/drawing/2014/main" id="{E2A9B330-52D8-DC2A-29D6-6077CA2AB831}"/>
+              </a:ext>
+            </a:extLst>
+          </p:cNvPr>
+          <p:cNvPicPr>
+            <a:picLocks noGrp="1" noChangeAspect="1"/>
+          </p:cNvPicPr>
+          <p:nvPr>
+            <p:ph idx="1"/>
+          </p:nvPr>
+        </p:nvPicPr>
+        <p:blipFill>
+          <a:blip r:embed="rId2">
+            <a:extLst>
+              <a:ext uri="{28A0092B-C50C-407E-A947-70E740481C1C}">
+                <a14:useLocalDpi xmlns:a14="http://schemas.microsoft.com/office/drawing/2010/main" val="0"/>
+              </a:ext>
+            </a:extLst>
+          </a:blip>
+          <a:srcRect/>
+          <a:stretch/>
+        </p:blipFill>
+        <p:spPr>
+          <a:xfrm>
+            <a:off x="3072764" y="268605"/>
+            <a:ext cx="6046471" cy="6320790"/>
+          </a:xfrm>
+        </p:spPr>
+      </p:pic>
+    </p:spTree>
+    <p:extLst>
+      <p:ext uri="{BB962C8B-B14F-4D97-AF65-F5344CB8AC3E}">
+        <p14:creationId xmlns:p14="http://schemas.microsoft.com/office/powerpoint/2010/main" val="3855003021"/>
+      </p:ext>
+    </p:extLst>
+  </p:cSld>
+  <p:clrMapOvr>
+    <a:masterClrMapping/>
+  </p:clrMapOvr>
+</p:sld>
+</file>
+
+<file path=ppt/slides/slide51.xml><?xml version="1.0" encoding="utf-8"?>
+<p:sld xmlns:a="http://schemas.openxmlformats.org/drawingml/2006/main" xmlns:r="http://schemas.openxmlformats.org/officeDocument/2006/relationships" xmlns:p="http://schemas.openxmlformats.org/presentationml/2006/main">
+  <p:cSld>
+    <p:spTree>
+      <p:nvGrpSpPr>
+        <p:cNvPr id="1" name="">
+          <a:extLst>
+            <a:ext uri="{FF2B5EF4-FFF2-40B4-BE49-F238E27FC236}">
               <a16:creationId xmlns:a16="http://schemas.microsoft.com/office/drawing/2014/main" id="{2B2C07AD-C14E-5AA1-431D-836469C3C9D8}"/>
             </a:ext>
           </a:extLst>
@@ -31260,76 +31659,6 @@
     <p:extLst>
       <p:ext uri="{BB962C8B-B14F-4D97-AF65-F5344CB8AC3E}">
         <p14:creationId xmlns:p14="http://schemas.microsoft.com/office/powerpoint/2010/main" val="3100666118"/>
-      </p:ext>
-    </p:extLst>
-  </p:cSld>
-  <p:clrMapOvr>
-    <a:masterClrMapping/>
-  </p:clrMapOvr>
-</p:sld>
-</file>
-
-<file path=ppt/slides/slide51.xml><?xml version="1.0" encoding="utf-8"?>
-<p:sld xmlns:a="http://schemas.openxmlformats.org/drawingml/2006/main" xmlns:r="http://schemas.openxmlformats.org/officeDocument/2006/relationships" xmlns:p="http://schemas.openxmlformats.org/presentationml/2006/main">
-  <p:cSld>
-    <p:spTree>
-      <p:nvGrpSpPr>
-        <p:cNvPr id="1" name="">
-          <a:extLst>
-            <a:ext uri="{FF2B5EF4-FFF2-40B4-BE49-F238E27FC236}">
-              <a16:creationId xmlns:a16="http://schemas.microsoft.com/office/drawing/2014/main" id="{579492ED-E621-9AFC-FD98-4A28B65CC317}"/>
-            </a:ext>
-          </a:extLst>
-        </p:cNvPr>
-        <p:cNvGrpSpPr/>
-        <p:nvPr/>
-      </p:nvGrpSpPr>
-      <p:grpSpPr>
-        <a:xfrm>
-          <a:off x="0" y="0"/>
-          <a:ext cx="0" cy="0"/>
-          <a:chOff x="0" y="0"/>
-          <a:chExt cx="0" cy="0"/>
-        </a:xfrm>
-      </p:grpSpPr>
-      <p:pic>
-        <p:nvPicPr>
-          <p:cNvPr id="5" name="Content Placeholder 4">
-            <a:extLst>
-              <a:ext uri="{FF2B5EF4-FFF2-40B4-BE49-F238E27FC236}">
-                <a16:creationId xmlns:a16="http://schemas.microsoft.com/office/drawing/2014/main" id="{EA35EC77-9FF6-E111-FC3D-9FEF40E773E9}"/>
-              </a:ext>
-            </a:extLst>
-          </p:cNvPr>
-          <p:cNvPicPr>
-            <a:picLocks noGrp="1" noChangeAspect="1"/>
-          </p:cNvPicPr>
-          <p:nvPr>
-            <p:ph idx="1"/>
-          </p:nvPr>
-        </p:nvPicPr>
-        <p:blipFill>
-          <a:blip r:embed="rId2">
-            <a:extLst>
-              <a:ext uri="{28A0092B-C50C-407E-A947-70E740481C1C}">
-                <a14:useLocalDpi xmlns:a14="http://schemas.microsoft.com/office/drawing/2010/main" val="0"/>
-              </a:ext>
-            </a:extLst>
-          </a:blip>
-          <a:srcRect/>
-          <a:stretch/>
-        </p:blipFill>
-        <p:spPr>
-          <a:xfrm>
-            <a:off x="3072764" y="1008697"/>
-            <a:ext cx="6046471" cy="4840605"/>
-          </a:xfrm>
-        </p:spPr>
-      </p:pic>
-    </p:spTree>
-    <p:extLst>
-      <p:ext uri="{BB962C8B-B14F-4D97-AF65-F5344CB8AC3E}">
-        <p14:creationId xmlns:p14="http://schemas.microsoft.com/office/powerpoint/2010/main" val="2804043165"/>
       </p:ext>
     </p:extLst>
   </p:cSld>
@@ -31542,105 +31871,6 @@
   <p:cSld>
     <p:spTree>
       <p:nvGrpSpPr>
-        <p:cNvPr id="1" name="">
-          <a:extLst>
-            <a:ext uri="{FF2B5EF4-FFF2-40B4-BE49-F238E27FC236}">
-              <a16:creationId xmlns:a16="http://schemas.microsoft.com/office/drawing/2014/main" id="{725EEF4C-10C9-9FE2-060C-ACDFA0D4B94B}"/>
-            </a:ext>
-          </a:extLst>
-        </p:cNvPr>
-        <p:cNvGrpSpPr/>
-        <p:nvPr/>
-      </p:nvGrpSpPr>
-      <p:grpSpPr>
-        <a:xfrm>
-          <a:off x="0" y="0"/>
-          <a:ext cx="0" cy="0"/>
-          <a:chOff x="0" y="0"/>
-          <a:chExt cx="0" cy="0"/>
-        </a:xfrm>
-      </p:grpSpPr>
-      <p:sp>
-        <p:nvSpPr>
-          <p:cNvPr id="2" name="Title 1">
-            <a:extLst>
-              <a:ext uri="{FF2B5EF4-FFF2-40B4-BE49-F238E27FC236}">
-                <a16:creationId xmlns:a16="http://schemas.microsoft.com/office/drawing/2014/main" id="{64A8D221-A594-8865-A199-11714FC6B217}"/>
-              </a:ext>
-            </a:extLst>
-          </p:cNvPr>
-          <p:cNvSpPr>
-            <a:spLocks noGrp="1"/>
-          </p:cNvSpPr>
-          <p:nvPr>
-            <p:ph type="title"/>
-          </p:nvPr>
-        </p:nvSpPr>
-        <p:spPr/>
-        <p:txBody>
-          <a:bodyPr/>
-          <a:lstStyle/>
-          <a:p>
-            <a:r>
-              <a:rPr lang="en-US" dirty="0"/>
-              <a:t>Time complexity</a:t>
-            </a:r>
-          </a:p>
-        </p:txBody>
-      </p:sp>
-      <p:pic>
-        <p:nvPicPr>
-          <p:cNvPr id="5" name="Content Placeholder 4">
-            <a:extLst>
-              <a:ext uri="{FF2B5EF4-FFF2-40B4-BE49-F238E27FC236}">
-                <a16:creationId xmlns:a16="http://schemas.microsoft.com/office/drawing/2014/main" id="{8AEBB29A-A412-BB82-B0A5-B21AB4161BE4}"/>
-              </a:ext>
-            </a:extLst>
-          </p:cNvPr>
-          <p:cNvPicPr>
-            <a:picLocks noGrp="1" noChangeAspect="1"/>
-          </p:cNvPicPr>
-          <p:nvPr>
-            <p:ph idx="1"/>
-          </p:nvPr>
-        </p:nvPicPr>
-        <p:blipFill>
-          <a:blip r:embed="rId2">
-            <a:extLst>
-              <a:ext uri="{28A0092B-C50C-407E-A947-70E740481C1C}">
-                <a14:useLocalDpi xmlns:a14="http://schemas.microsoft.com/office/drawing/2010/main" val="0"/>
-              </a:ext>
-            </a:extLst>
-          </a:blip>
-          <a:stretch>
-            <a:fillRect/>
-          </a:stretch>
-        </p:blipFill>
-        <p:spPr>
-          <a:xfrm>
-            <a:off x="2591568" y="1690688"/>
-            <a:ext cx="7008863" cy="3808064"/>
-          </a:xfrm>
-        </p:spPr>
-      </p:pic>
-    </p:spTree>
-    <p:extLst>
-      <p:ext uri="{BB962C8B-B14F-4D97-AF65-F5344CB8AC3E}">
-        <p14:creationId xmlns:p14="http://schemas.microsoft.com/office/powerpoint/2010/main" val="3087895742"/>
-      </p:ext>
-    </p:extLst>
-  </p:cSld>
-  <p:clrMapOvr>
-    <a:masterClrMapping/>
-  </p:clrMapOvr>
-</p:sld>
-</file>
-
-<file path=ppt/slides/slide55.xml><?xml version="1.0" encoding="utf-8"?>
-<p:sld xmlns:a="http://schemas.openxmlformats.org/drawingml/2006/main" xmlns:r="http://schemas.openxmlformats.org/officeDocument/2006/relationships" xmlns:p="http://schemas.openxmlformats.org/presentationml/2006/main">
-  <p:cSld>
-    <p:spTree>
-      <p:nvGrpSpPr>
         <p:cNvPr id="1" name=""/>
         <p:cNvGrpSpPr/>
         <p:nvPr/>
@@ -31722,7 +31952,7 @@
 </p:sld>
 </file>
 
-<file path=ppt/slides/slide56.xml><?xml version="1.0" encoding="utf-8"?>
+<file path=ppt/slides/slide55.xml><?xml version="1.0" encoding="utf-8"?>
 <p:sld xmlns:a="http://schemas.openxmlformats.org/drawingml/2006/main" xmlns:r="http://schemas.openxmlformats.org/officeDocument/2006/relationships" xmlns:p="http://schemas.openxmlformats.org/presentationml/2006/main">
   <p:cSld>
     <p:spTree>
@@ -31820,7 +32050,7 @@
 </p:sld>
 </file>
 
-<file path=ppt/slides/slide57.xml><?xml version="1.0" encoding="utf-8"?>
+<file path=ppt/slides/slide56.xml><?xml version="1.0" encoding="utf-8"?>
 <p:sld xmlns:a="http://schemas.openxmlformats.org/drawingml/2006/main" xmlns:r="http://schemas.openxmlformats.org/officeDocument/2006/relationships" xmlns:p="http://schemas.openxmlformats.org/presentationml/2006/main">
   <p:cSld>
     <p:bg>
@@ -33027,7 +33257,7 @@
 </p:sld>
 </file>
 
-<file path=ppt/slides/slide58.xml><?xml version="1.0" encoding="utf-8"?>
+<file path=ppt/slides/slide57.xml><?xml version="1.0" encoding="utf-8"?>
 <p:sld xmlns:a="http://schemas.openxmlformats.org/drawingml/2006/main" xmlns:r="http://schemas.openxmlformats.org/officeDocument/2006/relationships" xmlns:p="http://schemas.openxmlformats.org/presentationml/2006/main">
   <p:cSld>
     <p:bg>
@@ -34226,7 +34456,7 @@
 </p:sld>
 </file>
 
-<file path=ppt/slides/slide59.xml><?xml version="1.0" encoding="utf-8"?>
+<file path=ppt/slides/slide58.xml><?xml version="1.0" encoding="utf-8"?>
 <p:sld xmlns:a="http://schemas.openxmlformats.org/drawingml/2006/main" xmlns:r="http://schemas.openxmlformats.org/officeDocument/2006/relationships" xmlns:p="http://schemas.openxmlformats.org/presentationml/2006/main">
   <p:cSld>
     <p:bg>
@@ -34881,6 +35111,104 @@
 </p:sld>
 </file>
 
+<file path=ppt/slides/slide59.xml><?xml version="1.0" encoding="utf-8"?>
+<p:sld xmlns:a="http://schemas.openxmlformats.org/drawingml/2006/main" xmlns:r="http://schemas.openxmlformats.org/officeDocument/2006/relationships" xmlns:p="http://schemas.openxmlformats.org/presentationml/2006/main">
+  <p:cSld>
+    <p:spTree>
+      <p:nvGrpSpPr>
+        <p:cNvPr id="1" name="">
+          <a:extLst>
+            <a:ext uri="{FF2B5EF4-FFF2-40B4-BE49-F238E27FC236}">
+              <a16:creationId xmlns:a16="http://schemas.microsoft.com/office/drawing/2014/main" id="{22BE9F4E-356D-CCB8-65B9-C85EDB0BC146}"/>
+            </a:ext>
+          </a:extLst>
+        </p:cNvPr>
+        <p:cNvGrpSpPr/>
+        <p:nvPr/>
+      </p:nvGrpSpPr>
+      <p:grpSpPr>
+        <a:xfrm>
+          <a:off x="0" y="0"/>
+          <a:ext cx="0" cy="0"/>
+          <a:chOff x="0" y="0"/>
+          <a:chExt cx="0" cy="0"/>
+        </a:xfrm>
+      </p:grpSpPr>
+      <p:sp>
+        <p:nvSpPr>
+          <p:cNvPr id="2" name="Title 1">
+            <a:extLst>
+              <a:ext uri="{FF2B5EF4-FFF2-40B4-BE49-F238E27FC236}">
+                <a16:creationId xmlns:a16="http://schemas.microsoft.com/office/drawing/2014/main" id="{B4EAEC6C-A192-BB7A-2B0D-0653D4EF05A8}"/>
+              </a:ext>
+            </a:extLst>
+          </p:cNvPr>
+          <p:cNvSpPr>
+            <a:spLocks noGrp="1"/>
+          </p:cNvSpPr>
+          <p:nvPr>
+            <p:ph type="title"/>
+          </p:nvPr>
+        </p:nvSpPr>
+        <p:spPr/>
+        <p:txBody>
+          <a:bodyPr/>
+          <a:lstStyle/>
+          <a:p>
+            <a:r>
+              <a:rPr lang="en-US" dirty="0"/>
+              <a:t>Linux uses Heapsort! – F.Y.I</a:t>
+            </a:r>
+          </a:p>
+        </p:txBody>
+      </p:sp>
+      <p:sp>
+        <p:nvSpPr>
+          <p:cNvPr id="4" name="Content Placeholder 3">
+            <a:extLst>
+              <a:ext uri="{FF2B5EF4-FFF2-40B4-BE49-F238E27FC236}">
+                <a16:creationId xmlns:a16="http://schemas.microsoft.com/office/drawing/2014/main" id="{90093E7B-B3E9-4A43-5093-C79379D4D07D}"/>
+              </a:ext>
+            </a:extLst>
+          </p:cNvPr>
+          <p:cNvSpPr>
+            <a:spLocks noGrp="1"/>
+          </p:cNvSpPr>
+          <p:nvPr>
+            <p:ph idx="1"/>
+          </p:nvPr>
+        </p:nvSpPr>
+        <p:spPr/>
+        <p:txBody>
+          <a:bodyPr/>
+          <a:lstStyle/>
+          <a:p>
+            <a:r>
+              <a:rPr lang="en-US" dirty="0">
+                <a:hlinkClick r:id="rId2"/>
+              </a:rPr>
+              <a:t>https://github.com/torvalds/linux/blob/master/lib/sort.c#L53</a:t>
+            </a:r>
+            <a:endParaRPr lang="en-US" dirty="0"/>
+          </a:p>
+          <a:p>
+            <a:endParaRPr lang="en-US" dirty="0"/>
+          </a:p>
+        </p:txBody>
+      </p:sp>
+    </p:spTree>
+    <p:extLst>
+      <p:ext uri="{BB962C8B-B14F-4D97-AF65-F5344CB8AC3E}">
+        <p14:creationId xmlns:p14="http://schemas.microsoft.com/office/powerpoint/2010/main" val="1492930601"/>
+      </p:ext>
+    </p:extLst>
+  </p:cSld>
+  <p:clrMapOvr>
+    <a:masterClrMapping/>
+  </p:clrMapOvr>
+</p:sld>
+</file>
+
 <file path=ppt/slides/slide6.xml><?xml version="1.0" encoding="utf-8"?>
 <p:sld xmlns:a="http://schemas.openxmlformats.org/drawingml/2006/main" xmlns:r="http://schemas.openxmlformats.org/officeDocument/2006/relationships" xmlns:p="http://schemas.openxmlformats.org/presentationml/2006/main">
   <p:cSld>
@@ -35014,104 +35342,6 @@
 </file>
 
 <file path=ppt/slides/slide60.xml><?xml version="1.0" encoding="utf-8"?>
-<p:sld xmlns:a="http://schemas.openxmlformats.org/drawingml/2006/main" xmlns:r="http://schemas.openxmlformats.org/officeDocument/2006/relationships" xmlns:p="http://schemas.openxmlformats.org/presentationml/2006/main">
-  <p:cSld>
-    <p:spTree>
-      <p:nvGrpSpPr>
-        <p:cNvPr id="1" name="">
-          <a:extLst>
-            <a:ext uri="{FF2B5EF4-FFF2-40B4-BE49-F238E27FC236}">
-              <a16:creationId xmlns:a16="http://schemas.microsoft.com/office/drawing/2014/main" id="{22BE9F4E-356D-CCB8-65B9-C85EDB0BC146}"/>
-            </a:ext>
-          </a:extLst>
-        </p:cNvPr>
-        <p:cNvGrpSpPr/>
-        <p:nvPr/>
-      </p:nvGrpSpPr>
-      <p:grpSpPr>
-        <a:xfrm>
-          <a:off x="0" y="0"/>
-          <a:ext cx="0" cy="0"/>
-          <a:chOff x="0" y="0"/>
-          <a:chExt cx="0" cy="0"/>
-        </a:xfrm>
-      </p:grpSpPr>
-      <p:sp>
-        <p:nvSpPr>
-          <p:cNvPr id="2" name="Title 1">
-            <a:extLst>
-              <a:ext uri="{FF2B5EF4-FFF2-40B4-BE49-F238E27FC236}">
-                <a16:creationId xmlns:a16="http://schemas.microsoft.com/office/drawing/2014/main" id="{B4EAEC6C-A192-BB7A-2B0D-0653D4EF05A8}"/>
-              </a:ext>
-            </a:extLst>
-          </p:cNvPr>
-          <p:cNvSpPr>
-            <a:spLocks noGrp="1"/>
-          </p:cNvSpPr>
-          <p:nvPr>
-            <p:ph type="title"/>
-          </p:nvPr>
-        </p:nvSpPr>
-        <p:spPr/>
-        <p:txBody>
-          <a:bodyPr/>
-          <a:lstStyle/>
-          <a:p>
-            <a:r>
-              <a:rPr lang="en-US" dirty="0"/>
-              <a:t>Linux uses Heapsort! – F.Y.I</a:t>
-            </a:r>
-          </a:p>
-        </p:txBody>
-      </p:sp>
-      <p:sp>
-        <p:nvSpPr>
-          <p:cNvPr id="4" name="Content Placeholder 3">
-            <a:extLst>
-              <a:ext uri="{FF2B5EF4-FFF2-40B4-BE49-F238E27FC236}">
-                <a16:creationId xmlns:a16="http://schemas.microsoft.com/office/drawing/2014/main" id="{90093E7B-B3E9-4A43-5093-C79379D4D07D}"/>
-              </a:ext>
-            </a:extLst>
-          </p:cNvPr>
-          <p:cNvSpPr>
-            <a:spLocks noGrp="1"/>
-          </p:cNvSpPr>
-          <p:nvPr>
-            <p:ph idx="1"/>
-          </p:nvPr>
-        </p:nvSpPr>
-        <p:spPr/>
-        <p:txBody>
-          <a:bodyPr/>
-          <a:lstStyle/>
-          <a:p>
-            <a:r>
-              <a:rPr lang="en-US" dirty="0">
-                <a:hlinkClick r:id="rId2"/>
-              </a:rPr>
-              <a:t>https://github.com/torvalds/linux/blob/master/lib/sort.c#L53</a:t>
-            </a:r>
-            <a:endParaRPr lang="en-US" dirty="0"/>
-          </a:p>
-          <a:p>
-            <a:endParaRPr lang="en-US" dirty="0"/>
-          </a:p>
-        </p:txBody>
-      </p:sp>
-    </p:spTree>
-    <p:extLst>
-      <p:ext uri="{BB962C8B-B14F-4D97-AF65-F5344CB8AC3E}">
-        <p14:creationId xmlns:p14="http://schemas.microsoft.com/office/powerpoint/2010/main" val="1492930601"/>
-      </p:ext>
-    </p:extLst>
-  </p:cSld>
-  <p:clrMapOvr>
-    <a:masterClrMapping/>
-  </p:clrMapOvr>
-</p:sld>
-</file>
-
-<file path=ppt/slides/slide61.xml><?xml version="1.0" encoding="utf-8"?>
 <p:sld xmlns:a="http://schemas.openxmlformats.org/drawingml/2006/main" xmlns:r="http://schemas.openxmlformats.org/officeDocument/2006/relationships" xmlns:p="http://schemas.openxmlformats.org/presentationml/2006/main">
   <p:cSld>
     <p:spTree>
